--- a/assets/TCS302/Unit-1/Lecture3_4_Pointers_Structures_DM_Algo_complexity.pptx
+++ b/assets/TCS302/Unit-1/Lecture3_4_Pointers_Structures_DM_Algo_complexity.pptx
@@ -882,9 +882,7 @@
           <a:bodyPr/>
           <a:lstStyle/>
           <a:p>
-            <a:r>
-              <a:t>Welcome the students. Tell them that Lecture 1 introduced basic data organization. Lecture 2 focuses on the operations and the idea of ADT.</a:t>
-            </a:r>
+            <a:endParaRPr dirty="0"/>
           </a:p>
         </p:txBody>
       </p:sp>
@@ -959,9 +957,7 @@
           <a:bodyPr/>
           <a:lstStyle/>
           <a:p>
-            <a:r>
-              <a:t>ADT is a major conceptual point. Make sure students understand the separation between interface and implementation.</a:t>
-            </a:r>
+            <a:endParaRPr dirty="0"/>
           </a:p>
         </p:txBody>
       </p:sp>
@@ -1036,9 +1032,7 @@
           <a:bodyPr/>
           <a:lstStyle/>
           <a:p>
-            <a:r>
-              <a:t>This is the central formula for the lecture.</a:t>
-            </a:r>
+            <a:endParaRPr dirty="0"/>
           </a:p>
         </p:txBody>
       </p:sp>
@@ -1113,9 +1107,7 @@
           <a:bodyPr/>
           <a:lstStyle/>
           <a:p>
-            <a:r>
-              <a:t>Use physical analogy to reinforce LIFO.</a:t>
-            </a:r>
+            <a:endParaRPr dirty="0"/>
           </a:p>
         </p:txBody>
       </p:sp>
@@ -1190,9 +1182,7 @@
           <a:bodyPr/>
           <a:lstStyle/>
           <a:p>
-            <a:r>
-              <a:t>Make the interface versus implementation distinction explicit.</a:t>
-            </a:r>
+            <a:endParaRPr dirty="0"/>
           </a:p>
         </p:txBody>
       </p:sp>
@@ -1267,9 +1257,7 @@
           <a:bodyPr/>
           <a:lstStyle/>
           <a:p>
-            <a:r>
-              <a:t>Do not go too deep into pointers yet. Just preview why pointers and structures are needed.</a:t>
-            </a:r>
+            <a:endParaRPr dirty="0"/>
           </a:p>
         </p:txBody>
       </p:sp>
@@ -1344,9 +1332,7 @@
           <a:bodyPr/>
           <a:lstStyle/>
           <a:p>
-            <a:r>
-              <a:t>This activity reinforces ADT design: data, operations and rules.</a:t>
-            </a:r>
+            <a:endParaRPr dirty="0"/>
           </a:p>
         </p:txBody>
       </p:sp>
@@ -1421,9 +1407,7 @@
           <a:bodyPr/>
           <a:lstStyle/>
           <a:p>
-            <a:r>
-              <a:t>End by previewing Lecture 3.</a:t>
-            </a:r>
+            <a:endParaRPr dirty="0"/>
           </a:p>
         </p:txBody>
       </p:sp>
@@ -1498,9 +1482,7 @@
           <a:bodyPr/>
           <a:lstStyle/>
           <a:p>
-            <a:r>
-              <a:t>Use this slide to create continuity. Mention that the next lecture will use C features to implement these ideas.</a:t>
-            </a:r>
+            <a:endParaRPr dirty="0"/>
           </a:p>
         </p:txBody>
       </p:sp>
@@ -1575,9 +1557,7 @@
           <a:bodyPr/>
           <a:lstStyle/>
           <a:p>
-            <a:r>
-              <a:t>Keep this slide short. The goal is to make students clear about the purpose of the lecture.</a:t>
-            </a:r>
+            <a:endParaRPr dirty="0"/>
           </a:p>
         </p:txBody>
       </p:sp>
@@ -1652,9 +1632,7 @@
           <a:bodyPr/>
           <a:lstStyle/>
           <a:p>
-            <a:r>
-              <a:t>Introduce operation names. Avoid deep complexity details here; focus on meaning.</a:t>
-            </a:r>
+            <a:endParaRPr dirty="0"/>
           </a:p>
         </p:txBody>
       </p:sp>
@@ -1729,9 +1707,7 @@
           <a:bodyPr/>
           <a:lstStyle/>
           <a:p>
-            <a:r>
-              <a:t>Explain that creating a data structure is the first operation. In C, uninitialized variables are a common source of errors.</a:t>
-            </a:r>
+            <a:endParaRPr dirty="0"/>
           </a:p>
         </p:txBody>
       </p:sp>
@@ -1806,9 +1782,7 @@
           <a:bodyPr/>
           <a:lstStyle/>
           <a:p>
-            <a:r>
-              <a:t>Use the highlighted cell to show that a loop moves step by step.</a:t>
-            </a:r>
+            <a:endParaRPr dirty="0"/>
           </a:p>
         </p:txBody>
       </p:sp>
@@ -1883,9 +1857,7 @@
           <a:bodyPr/>
           <a:lstStyle/>
           <a:p>
-            <a:r>
-              <a:t>Explain that searching is a common operation in databases, contact lists and student records.</a:t>
-            </a:r>
+            <a:endParaRPr dirty="0"/>
           </a:p>
         </p:txBody>
       </p:sp>
@@ -1960,9 +1932,7 @@
           <a:bodyPr/>
           <a:lstStyle/>
           <a:p>
-            <a:r>
-              <a:t>These are mutation operations. Explain that they may be costlier than traversal depending on structure.</a:t>
-            </a:r>
+            <a:endParaRPr dirty="0"/>
           </a:p>
         </p:txBody>
       </p:sp>
@@ -2037,9 +2007,7 @@
           <a:bodyPr/>
           <a:lstStyle/>
           <a:p>
-            <a:r>
-              <a:t>Keep comparison qualitative here. Detailed complexity will follow in later lectures.</a:t>
-            </a:r>
+            <a:endParaRPr dirty="0"/>
           </a:p>
         </p:txBody>
       </p:sp>
@@ -3374,53 +3342,6 @@
           </a:p>
         </p:txBody>
       </p:sp>
-      <p:sp>
-        <p:nvSpPr>
-          <p:cNvPr id="12" name="Text 9">
-            <a:extLst>
-              <a:ext uri="{FF2B5EF4-FFF2-40B4-BE49-F238E27FC236}">
-                <a16:creationId xmlns:a16="http://schemas.microsoft.com/office/drawing/2014/main" id="{9FBC7726-36ED-4171-B91A-4B3ED7C943A2}"/>
-              </a:ext>
-            </a:extLst>
-          </p:cNvPr>
-          <p:cNvSpPr>
-            <a:spLocks noGrp="1"/>
-          </p:cNvSpPr>
-          <p:nvPr/>
-        </p:nvSpPr>
-        <p:spPr>
-          <a:xfrm>
-            <a:off x="457200" y="6419850"/>
-            <a:ext cx="11247120" cy="400050"/>
-          </a:xfrm>
-          <a:prstGeom prst="rect">
-            <a:avLst/>
-          </a:prstGeom>
-          <a:noFill/>
-        </p:spPr>
-        <p:txBody>
-          <a:bodyPr wrap="square" lIns="0" tIns="0" rIns="0" bIns="0" anchor="ctr">
-            <a:normAutofit lnSpcReduction="10000"/>
-          </a:bodyPr>
-          <a:lstStyle/>
-          <a:p>
-            <a:pPr marL="0" indent="0">
-              <a:buNone/>
-            </a:pPr>
-            <a:r>
-              <a:rPr sz="2500" i="1">
-                <a:solidFill>
-                  <a:srgbClr val="475467"/>
-                </a:solidFill>
-                <a:latin typeface="Times New Roman"/>
-                <a:ea typeface="Times New Roman"/>
-                <a:cs typeface="Times New Roman"/>
-              </a:rPr>
-              <a:t>Teaching cue: Contrast automatic stack lifetime with manual heap lifetime.</a:t>
-            </a:r>
-          </a:p>
-        </p:txBody>
-      </p:sp>
     </p:spTree>
     <p:extLst>
       <p:ext uri="{BB962C8B-B14F-4D97-AF65-F5344CB8AC3E}">
@@ -4077,53 +3998,6 @@
           </a:p>
         </p:txBody>
       </p:sp>
-      <p:sp>
-        <p:nvSpPr>
-          <p:cNvPr id="15" name="Text 13">
-            <a:extLst>
-              <a:ext uri="{FF2B5EF4-FFF2-40B4-BE49-F238E27FC236}">
-                <a16:creationId xmlns:a16="http://schemas.microsoft.com/office/drawing/2014/main" id="{9F272D22-CEE6-434E-9854-FFDA3E1B7E27}"/>
-              </a:ext>
-            </a:extLst>
-          </p:cNvPr>
-          <p:cNvSpPr>
-            <a:spLocks noGrp="1"/>
-          </p:cNvSpPr>
-          <p:nvPr/>
-        </p:nvSpPr>
-        <p:spPr>
-          <a:xfrm>
-            <a:off x="457200" y="6419850"/>
-            <a:ext cx="11247120" cy="400050"/>
-          </a:xfrm>
-          <a:prstGeom prst="rect">
-            <a:avLst/>
-          </a:prstGeom>
-          <a:noFill/>
-        </p:spPr>
-        <p:txBody>
-          <a:bodyPr wrap="square" lIns="0" tIns="0" rIns="0" bIns="0" anchor="ctr">
-            <a:normAutofit lnSpcReduction="10000"/>
-          </a:bodyPr>
-          <a:lstStyle/>
-          <a:p>
-            <a:pPr marL="0" indent="0">
-              <a:buNone/>
-            </a:pPr>
-            <a:r>
-              <a:rPr sz="2500" i="1">
-                <a:solidFill>
-                  <a:srgbClr val="475467"/>
-                </a:solidFill>
-                <a:latin typeface="Times New Roman"/>
-                <a:ea typeface="Times New Roman"/>
-                <a:cs typeface="Times New Roman"/>
-              </a:rPr>
-              <a:t>Teaching cue: Ask what happens if malloc returns NULL.</a:t>
-            </a:r>
-          </a:p>
-        </p:txBody>
-      </p:sp>
     </p:spTree>
     <p:extLst>
       <p:ext uri="{BB962C8B-B14F-4D97-AF65-F5344CB8AC3E}">
@@ -5172,53 +5046,6 @@
       </p:sp>
       <p:sp>
         <p:nvSpPr>
-          <p:cNvPr id="23" name="Text 21">
-            <a:extLst>
-              <a:ext uri="{FF2B5EF4-FFF2-40B4-BE49-F238E27FC236}">
-                <a16:creationId xmlns:a16="http://schemas.microsoft.com/office/drawing/2014/main" id="{73CD26AE-39C9-4B8C-9E5E-B38FBE2B5364}"/>
-              </a:ext>
-            </a:extLst>
-          </p:cNvPr>
-          <p:cNvSpPr>
-            <a:spLocks noGrp="1"/>
-          </p:cNvSpPr>
-          <p:nvPr/>
-        </p:nvSpPr>
-        <p:spPr>
-          <a:xfrm>
-            <a:off x="457200" y="6419850"/>
-            <a:ext cx="11247120" cy="400050"/>
-          </a:xfrm>
-          <a:prstGeom prst="rect">
-            <a:avLst/>
-          </a:prstGeom>
-          <a:noFill/>
-        </p:spPr>
-        <p:txBody>
-          <a:bodyPr wrap="square" lIns="0" tIns="0" rIns="0" bIns="0" anchor="ctr">
-            <a:normAutofit lnSpcReduction="10000"/>
-          </a:bodyPr>
-          <a:lstStyle/>
-          <a:p>
-            <a:pPr marL="0" indent="0">
-              <a:buNone/>
-            </a:pPr>
-            <a:r>
-              <a:rPr sz="2500" i="1">
-                <a:solidFill>
-                  <a:srgbClr val="475467"/>
-                </a:solidFill>
-                <a:latin typeface="Times New Roman"/>
-                <a:ea typeface="Times New Roman"/>
-                <a:cs typeface="Times New Roman"/>
-              </a:rPr>
-              <a:t>Teaching cue: Explain dangling pointers using the released block.</a:t>
-            </a:r>
-          </a:p>
-        </p:txBody>
-      </p:sp>
-      <p:sp>
-        <p:nvSpPr>
           <p:cNvPr id="28" name="Shape 20">
             <a:extLst>
               <a:ext uri="{FF2B5EF4-FFF2-40B4-BE49-F238E27FC236}">
@@ -5252,53 +5079,6 @@
           <a:lstStyle/>
           <a:p>
             <a:endParaRPr/>
-          </a:p>
-        </p:txBody>
-      </p:sp>
-      <p:sp>
-        <p:nvSpPr>
-          <p:cNvPr id="29" name="Text 21">
-            <a:extLst>
-              <a:ext uri="{FF2B5EF4-FFF2-40B4-BE49-F238E27FC236}">
-                <a16:creationId xmlns:a16="http://schemas.microsoft.com/office/drawing/2014/main" id="{5BF73D00-7897-43A0-8F79-5D07CF5E7F08}"/>
-              </a:ext>
-            </a:extLst>
-          </p:cNvPr>
-          <p:cNvSpPr>
-            <a:spLocks noGrp="1"/>
-          </p:cNvSpPr>
-          <p:nvPr/>
-        </p:nvSpPr>
-        <p:spPr>
-          <a:xfrm>
-            <a:off x="457200" y="6419850"/>
-            <a:ext cx="11247120" cy="400050"/>
-          </a:xfrm>
-          <a:prstGeom prst="rect">
-            <a:avLst/>
-          </a:prstGeom>
-          <a:noFill/>
-        </p:spPr>
-        <p:txBody>
-          <a:bodyPr wrap="square" lIns="0" tIns="0" rIns="0" bIns="0" anchor="ctr">
-            <a:normAutofit lnSpcReduction="10000"/>
-          </a:bodyPr>
-          <a:lstStyle/>
-          <a:p>
-            <a:pPr marL="0" indent="0">
-              <a:buNone/>
-            </a:pPr>
-            <a:r>
-              <a:rPr sz="2500" i="1">
-                <a:solidFill>
-                  <a:srgbClr val="475467"/>
-                </a:solidFill>
-                <a:latin typeface="Times New Roman"/>
-                <a:ea typeface="Times New Roman"/>
-                <a:cs typeface="Times New Roman"/>
-              </a:rPr>
-              <a:t>Teaching cue: Explain dangling pointers using the released block.</a:t>
-            </a:r>
           </a:p>
         </p:txBody>
       </p:sp>
@@ -6229,53 +6009,6 @@
       </p:sp>
       <p:sp>
         <p:nvSpPr>
-          <p:cNvPr id="20" name="Text 18">
-            <a:extLst>
-              <a:ext uri="{FF2B5EF4-FFF2-40B4-BE49-F238E27FC236}">
-                <a16:creationId xmlns:a16="http://schemas.microsoft.com/office/drawing/2014/main" id="{11A9960D-3E51-4646-BBFF-1BB1A3EFE23E}"/>
-              </a:ext>
-            </a:extLst>
-          </p:cNvPr>
-          <p:cNvSpPr>
-            <a:spLocks noGrp="1"/>
-          </p:cNvSpPr>
-          <p:nvPr/>
-        </p:nvSpPr>
-        <p:spPr>
-          <a:xfrm>
-            <a:off x="457200" y="6419850"/>
-            <a:ext cx="11247120" cy="400050"/>
-          </a:xfrm>
-          <a:prstGeom prst="rect">
-            <a:avLst/>
-          </a:prstGeom>
-          <a:noFill/>
-        </p:spPr>
-        <p:txBody>
-          <a:bodyPr wrap="square" lIns="0" tIns="0" rIns="0" bIns="0" anchor="ctr">
-            <a:normAutofit lnSpcReduction="10000"/>
-          </a:bodyPr>
-          <a:lstStyle/>
-          <a:p>
-            <a:pPr marL="0" indent="0">
-              <a:buNone/>
-            </a:pPr>
-            <a:r>
-              <a:rPr sz="2500" i="1">
-                <a:solidFill>
-                  <a:srgbClr val="475467"/>
-                </a:solidFill>
-                <a:latin typeface="Times New Roman"/>
-                <a:ea typeface="Times New Roman"/>
-                <a:cs typeface="Times New Roman"/>
-              </a:rPr>
-              <a:t>Teaching cue: Ignore constants only after identifying the dominant term.</a:t>
-            </a:r>
-          </a:p>
-        </p:txBody>
-      </p:sp>
-      <p:sp>
-        <p:nvSpPr>
           <p:cNvPr id="31" name="Text 11">
             <a:extLst>
               <a:ext uri="{FF2B5EF4-FFF2-40B4-BE49-F238E27FC236}">
@@ -6606,53 +6339,6 @@
           <a:lstStyle/>
           <a:p>
             <a:endParaRPr/>
-          </a:p>
-        </p:txBody>
-      </p:sp>
-      <p:sp>
-        <p:nvSpPr>
-          <p:cNvPr id="38" name="Text 18">
-            <a:extLst>
-              <a:ext uri="{FF2B5EF4-FFF2-40B4-BE49-F238E27FC236}">
-                <a16:creationId xmlns:a16="http://schemas.microsoft.com/office/drawing/2014/main" id="{D9D06D6A-B969-4756-8AC3-C8AD7BA8E56C}"/>
-              </a:ext>
-            </a:extLst>
-          </p:cNvPr>
-          <p:cNvSpPr>
-            <a:spLocks noGrp="1"/>
-          </p:cNvSpPr>
-          <p:nvPr/>
-        </p:nvSpPr>
-        <p:spPr>
-          <a:xfrm>
-            <a:off x="457200" y="6419850"/>
-            <a:ext cx="11247120" cy="400050"/>
-          </a:xfrm>
-          <a:prstGeom prst="rect">
-            <a:avLst/>
-          </a:prstGeom>
-          <a:noFill/>
-        </p:spPr>
-        <p:txBody>
-          <a:bodyPr wrap="square" lIns="0" tIns="0" rIns="0" bIns="0" anchor="ctr">
-            <a:normAutofit lnSpcReduction="10000"/>
-          </a:bodyPr>
-          <a:lstStyle/>
-          <a:p>
-            <a:pPr marL="0" indent="0">
-              <a:buNone/>
-            </a:pPr>
-            <a:r>
-              <a:rPr sz="2500" i="1">
-                <a:solidFill>
-                  <a:srgbClr val="475467"/>
-                </a:solidFill>
-                <a:latin typeface="Times New Roman"/>
-                <a:ea typeface="Times New Roman"/>
-                <a:cs typeface="Times New Roman"/>
-              </a:rPr>
-              <a:t>Teaching cue: Ignore constants only after identifying the dominant term.</a:t>
-            </a:r>
           </a:p>
         </p:txBody>
       </p:sp>
@@ -7295,53 +6981,6 @@
           </a:p>
         </p:txBody>
       </p:sp>
-      <p:sp>
-        <p:nvSpPr>
-          <p:cNvPr id="13" name="Text 11">
-            <a:extLst>
-              <a:ext uri="{FF2B5EF4-FFF2-40B4-BE49-F238E27FC236}">
-                <a16:creationId xmlns:a16="http://schemas.microsoft.com/office/drawing/2014/main" id="{F592CCFB-BA0D-44E0-9F9D-CF900446394C}"/>
-              </a:ext>
-            </a:extLst>
-          </p:cNvPr>
-          <p:cNvSpPr>
-            <a:spLocks noGrp="1"/>
-          </p:cNvSpPr>
-          <p:nvPr/>
-        </p:nvSpPr>
-        <p:spPr>
-          <a:xfrm>
-            <a:off x="457200" y="6419850"/>
-            <a:ext cx="11247120" cy="400050"/>
-          </a:xfrm>
-          <a:prstGeom prst="rect">
-            <a:avLst/>
-          </a:prstGeom>
-          <a:noFill/>
-        </p:spPr>
-        <p:txBody>
-          <a:bodyPr wrap="square" lIns="0" tIns="0" rIns="0" bIns="0" anchor="ctr">
-            <a:normAutofit lnSpcReduction="10000"/>
-          </a:bodyPr>
-          <a:lstStyle/>
-          <a:p>
-            <a:pPr marL="0" indent="0">
-              <a:buNone/>
-            </a:pPr>
-            <a:r>
-              <a:rPr sz="2500" i="1">
-                <a:solidFill>
-                  <a:srgbClr val="475467"/>
-                </a:solidFill>
-                <a:latin typeface="Times New Roman"/>
-                <a:ea typeface="Times New Roman"/>
-                <a:cs typeface="Times New Roman"/>
-              </a:rPr>
-              <a:t>Teaching cue: Ask students to count executions before naming complexity.</a:t>
-            </a:r>
-          </a:p>
-        </p:txBody>
-      </p:sp>
     </p:spTree>
     <p:extLst>
       <p:ext uri="{BB962C8B-B14F-4D97-AF65-F5344CB8AC3E}">
@@ -7986,53 +7625,6 @@
           </a:p>
         </p:txBody>
       </p:sp>
-      <p:sp>
-        <p:nvSpPr>
-          <p:cNvPr id="13" name="Text 11">
-            <a:extLst>
-              <a:ext uri="{FF2B5EF4-FFF2-40B4-BE49-F238E27FC236}">
-                <a16:creationId xmlns:a16="http://schemas.microsoft.com/office/drawing/2014/main" id="{A01C1A61-3B94-4ACB-B3A1-23DCC70A1BB1}"/>
-              </a:ext>
-            </a:extLst>
-          </p:cNvPr>
-          <p:cNvSpPr>
-            <a:spLocks noGrp="1"/>
-          </p:cNvSpPr>
-          <p:nvPr/>
-        </p:nvSpPr>
-        <p:spPr>
-          <a:xfrm>
-            <a:off x="457200" y="6419850"/>
-            <a:ext cx="11247120" cy="400050"/>
-          </a:xfrm>
-          <a:prstGeom prst="rect">
-            <a:avLst/>
-          </a:prstGeom>
-          <a:noFill/>
-        </p:spPr>
-        <p:txBody>
-          <a:bodyPr wrap="square" lIns="0" tIns="0" rIns="0" bIns="0" anchor="ctr">
-            <a:normAutofit lnSpcReduction="10000"/>
-          </a:bodyPr>
-          <a:lstStyle/>
-          <a:p>
-            <a:pPr marL="0" indent="0">
-              <a:buNone/>
-            </a:pPr>
-            <a:r>
-              <a:rPr sz="2500" i="1">
-                <a:solidFill>
-                  <a:srgbClr val="475467"/>
-                </a:solidFill>
-                <a:latin typeface="Times New Roman"/>
-                <a:ea typeface="Times New Roman"/>
-                <a:cs typeface="Times New Roman"/>
-              </a:rPr>
-              <a:t>Teaching cue: Let students justify both answers from the code.</a:t>
-            </a:r>
-          </a:p>
-        </p:txBody>
-      </p:sp>
     </p:spTree>
     <p:extLst>
       <p:ext uri="{BB962C8B-B14F-4D97-AF65-F5344CB8AC3E}">
@@ -8752,53 +8344,6 @@
           </a:p>
         </p:txBody>
       </p:sp>
-      <p:sp>
-        <p:nvSpPr>
-          <p:cNvPr id="16" name="Text 14">
-            <a:extLst>
-              <a:ext uri="{FF2B5EF4-FFF2-40B4-BE49-F238E27FC236}">
-                <a16:creationId xmlns:a16="http://schemas.microsoft.com/office/drawing/2014/main" id="{EBE6817B-DA51-49EA-A35D-6999B5CCEB6E}"/>
-              </a:ext>
-            </a:extLst>
-          </p:cNvPr>
-          <p:cNvSpPr>
-            <a:spLocks noGrp="1"/>
-          </p:cNvSpPr>
-          <p:nvPr/>
-        </p:nvSpPr>
-        <p:spPr>
-          <a:xfrm>
-            <a:off x="457200" y="6419850"/>
-            <a:ext cx="11247120" cy="400050"/>
-          </a:xfrm>
-          <a:prstGeom prst="rect">
-            <a:avLst/>
-          </a:prstGeom>
-          <a:noFill/>
-        </p:spPr>
-        <p:txBody>
-          <a:bodyPr wrap="square" lIns="0" tIns="0" rIns="0" bIns="0" anchor="ctr">
-            <a:normAutofit lnSpcReduction="10000"/>
-          </a:bodyPr>
-          <a:lstStyle/>
-          <a:p>
-            <a:pPr marL="0" indent="0">
-              <a:buNone/>
-            </a:pPr>
-            <a:r>
-              <a:rPr sz="2500" i="1">
-                <a:solidFill>
-                  <a:srgbClr val="475467"/>
-                </a:solidFill>
-                <a:latin typeface="Times New Roman"/>
-                <a:ea typeface="Times New Roman"/>
-                <a:cs typeface="Times New Roman"/>
-              </a:rPr>
-              <a:t>Teaching cue: Ask whether speed or memory matters more on a small embedded device.</a:t>
-            </a:r>
-          </a:p>
-        </p:txBody>
-      </p:sp>
     </p:spTree>
     <p:extLst>
       <p:ext uri="{BB962C8B-B14F-4D97-AF65-F5344CB8AC3E}">
@@ -9576,53 +9121,6 @@
           </a:p>
         </p:txBody>
       </p:sp>
-      <p:sp>
-        <p:nvSpPr>
-          <p:cNvPr id="17" name="Text 15">
-            <a:extLst>
-              <a:ext uri="{FF2B5EF4-FFF2-40B4-BE49-F238E27FC236}">
-                <a16:creationId xmlns:a16="http://schemas.microsoft.com/office/drawing/2014/main" id="{762CFA84-0EA1-45FB-939B-12524A25CE6C}"/>
-              </a:ext>
-            </a:extLst>
-          </p:cNvPr>
-          <p:cNvSpPr>
-            <a:spLocks noGrp="1"/>
-          </p:cNvSpPr>
-          <p:nvPr/>
-        </p:nvSpPr>
-        <p:spPr>
-          <a:xfrm>
-            <a:off x="457200" y="6419850"/>
-            <a:ext cx="11247120" cy="400050"/>
-          </a:xfrm>
-          <a:prstGeom prst="rect">
-            <a:avLst/>
-          </a:prstGeom>
-          <a:noFill/>
-        </p:spPr>
-        <p:txBody>
-          <a:bodyPr wrap="square" lIns="0" tIns="0" rIns="0" bIns="0" anchor="ctr">
-            <a:normAutofit lnSpcReduction="10000"/>
-          </a:bodyPr>
-          <a:lstStyle/>
-          <a:p>
-            <a:pPr marL="0" indent="0">
-              <a:buNone/>
-            </a:pPr>
-            <a:r>
-              <a:rPr sz="2500" i="1">
-                <a:solidFill>
-                  <a:srgbClr val="475467"/>
-                </a:solidFill>
-                <a:latin typeface="Times New Roman"/>
-                <a:ea typeface="Times New Roman"/>
-                <a:cs typeface="Times New Roman"/>
-              </a:rPr>
-              <a:t>Teaching cue: Relate the question to linked lists and dynamic arrays.</a:t>
-            </a:r>
-          </a:p>
-        </p:txBody>
-      </p:sp>
     </p:spTree>
     <p:extLst>
       <p:ext uri="{BB962C8B-B14F-4D97-AF65-F5344CB8AC3E}">
@@ -10545,53 +10043,6 @@
           </a:p>
         </p:txBody>
       </p:sp>
-      <p:sp>
-        <p:nvSpPr>
-          <p:cNvPr id="22" name="Text 20">
-            <a:extLst>
-              <a:ext uri="{FF2B5EF4-FFF2-40B4-BE49-F238E27FC236}">
-                <a16:creationId xmlns:a16="http://schemas.microsoft.com/office/drawing/2014/main" id="{8CF88585-7AF6-48A8-B54D-42AE27678A26}"/>
-              </a:ext>
-            </a:extLst>
-          </p:cNvPr>
-          <p:cNvSpPr>
-            <a:spLocks noGrp="1"/>
-          </p:cNvSpPr>
-          <p:nvPr/>
-        </p:nvSpPr>
-        <p:spPr>
-          <a:xfrm>
-            <a:off x="457200" y="6419850"/>
-            <a:ext cx="11247120" cy="400050"/>
-          </a:xfrm>
-          <a:prstGeom prst="rect">
-            <a:avLst/>
-          </a:prstGeom>
-          <a:noFill/>
-        </p:spPr>
-        <p:txBody>
-          <a:bodyPr wrap="square" lIns="0" tIns="0" rIns="0" bIns="0" anchor="ctr">
-            <a:normAutofit lnSpcReduction="10000"/>
-          </a:bodyPr>
-          <a:lstStyle/>
-          <a:p>
-            <a:pPr marL="0" indent="0">
-              <a:buNone/>
-            </a:pPr>
-            <a:r>
-              <a:rPr sz="2500" i="1">
-                <a:solidFill>
-                  <a:srgbClr val="475467"/>
-                </a:solidFill>
-                <a:latin typeface="Times New Roman"/>
-                <a:ea typeface="Times New Roman"/>
-                <a:cs typeface="Times New Roman"/>
-              </a:rPr>
-              <a:t>Teaching cue: Connect each outcome with one short C example.</a:t>
-            </a:r>
-          </a:p>
-        </p:txBody>
-      </p:sp>
     </p:spTree>
     <p:extLst>
       <p:ext uri="{BB962C8B-B14F-4D97-AF65-F5344CB8AC3E}">
@@ -11574,53 +11025,6 @@
       </p:sp>
       <p:sp>
         <p:nvSpPr>
-          <p:cNvPr id="23" name="Text 21">
-            <a:extLst>
-              <a:ext uri="{FF2B5EF4-FFF2-40B4-BE49-F238E27FC236}">
-                <a16:creationId xmlns:a16="http://schemas.microsoft.com/office/drawing/2014/main" id="{C6B37924-B732-49EA-A11B-0166F8851AF1}"/>
-              </a:ext>
-            </a:extLst>
-          </p:cNvPr>
-          <p:cNvSpPr>
-            <a:spLocks noGrp="1"/>
-          </p:cNvSpPr>
-          <p:nvPr/>
-        </p:nvSpPr>
-        <p:spPr>
-          <a:xfrm>
-            <a:off x="457200" y="6419850"/>
-            <a:ext cx="11247120" cy="400050"/>
-          </a:xfrm>
-          <a:prstGeom prst="rect">
-            <a:avLst/>
-          </a:prstGeom>
-          <a:noFill/>
-        </p:spPr>
-        <p:txBody>
-          <a:bodyPr wrap="square" lIns="0" tIns="0" rIns="0" bIns="0" anchor="ctr">
-            <a:normAutofit lnSpcReduction="10000"/>
-          </a:bodyPr>
-          <a:lstStyle/>
-          <a:p>
-            <a:pPr marL="0" indent="0">
-              <a:buNone/>
-            </a:pPr>
-            <a:r>
-              <a:rPr sz="2500" i="1">
-                <a:solidFill>
-                  <a:srgbClr val="475467"/>
-                </a:solidFill>
-                <a:latin typeface="Times New Roman"/>
-                <a:ea typeface="Times New Roman"/>
-                <a:cs typeface="Times New Roman"/>
-              </a:rPr>
-              <a:t>Teaching cue: Read int *p as “p points to an integer.”</a:t>
-            </a:r>
-          </a:p>
-        </p:txBody>
-      </p:sp>
-      <p:sp>
-        <p:nvSpPr>
           <p:cNvPr id="26" name="Shape 20">
             <a:extLst>
               <a:ext uri="{FF2B5EF4-FFF2-40B4-BE49-F238E27FC236}">
@@ -11654,53 +11058,6 @@
           <a:lstStyle/>
           <a:p>
             <a:endParaRPr/>
-          </a:p>
-        </p:txBody>
-      </p:sp>
-      <p:sp>
-        <p:nvSpPr>
-          <p:cNvPr id="27" name="Text 21">
-            <a:extLst>
-              <a:ext uri="{FF2B5EF4-FFF2-40B4-BE49-F238E27FC236}">
-                <a16:creationId xmlns:a16="http://schemas.microsoft.com/office/drawing/2014/main" id="{20CB1C9E-AA2D-42EF-B450-8A2DF404008D}"/>
-              </a:ext>
-            </a:extLst>
-          </p:cNvPr>
-          <p:cNvSpPr>
-            <a:spLocks noGrp="1"/>
-          </p:cNvSpPr>
-          <p:nvPr/>
-        </p:nvSpPr>
-        <p:spPr>
-          <a:xfrm>
-            <a:off x="457200" y="6419850"/>
-            <a:ext cx="11247120" cy="400050"/>
-          </a:xfrm>
-          <a:prstGeom prst="rect">
-            <a:avLst/>
-          </a:prstGeom>
-          <a:noFill/>
-        </p:spPr>
-        <p:txBody>
-          <a:bodyPr wrap="square" lIns="0" tIns="0" rIns="0" bIns="0" anchor="ctr">
-            <a:normAutofit lnSpcReduction="10000"/>
-          </a:bodyPr>
-          <a:lstStyle/>
-          <a:p>
-            <a:pPr marL="0" indent="0">
-              <a:buNone/>
-            </a:pPr>
-            <a:r>
-              <a:rPr sz="2500" i="1">
-                <a:solidFill>
-                  <a:srgbClr val="475467"/>
-                </a:solidFill>
-                <a:latin typeface="Times New Roman"/>
-                <a:ea typeface="Times New Roman"/>
-                <a:cs typeface="Times New Roman"/>
-              </a:rPr>
-              <a:t>Teaching cue: Read int *p as “p points to an integer.”</a:t>
-            </a:r>
           </a:p>
         </p:txBody>
       </p:sp>
@@ -12744,53 +12101,6 @@
       </p:sp>
       <p:sp>
         <p:nvSpPr>
-          <p:cNvPr id="23" name="Text 21">
-            <a:extLst>
-              <a:ext uri="{FF2B5EF4-FFF2-40B4-BE49-F238E27FC236}">
-                <a16:creationId xmlns:a16="http://schemas.microsoft.com/office/drawing/2014/main" id="{59B127ED-BC06-4BE1-B8BB-9F6B7F863EA9}"/>
-              </a:ext>
-            </a:extLst>
-          </p:cNvPr>
-          <p:cNvSpPr>
-            <a:spLocks noGrp="1"/>
-          </p:cNvSpPr>
-          <p:nvPr/>
-        </p:nvSpPr>
-        <p:spPr>
-          <a:xfrm>
-            <a:off x="457200" y="6419850"/>
-            <a:ext cx="11247120" cy="400050"/>
-          </a:xfrm>
-          <a:prstGeom prst="rect">
-            <a:avLst/>
-          </a:prstGeom>
-          <a:noFill/>
-        </p:spPr>
-        <p:txBody>
-          <a:bodyPr wrap="square" lIns="0" tIns="0" rIns="0" bIns="0" anchor="ctr">
-            <a:normAutofit lnSpcReduction="10000"/>
-          </a:bodyPr>
-          <a:lstStyle/>
-          <a:p>
-            <a:pPr marL="0" indent="0">
-              <a:buNone/>
-            </a:pPr>
-            <a:r>
-              <a:rPr sz="2500" i="1">
-                <a:solidFill>
-                  <a:srgbClr val="475467"/>
-                </a:solidFill>
-                <a:latin typeface="Times New Roman"/>
-                <a:ea typeface="Times New Roman"/>
-                <a:cs typeface="Times New Roman"/>
-              </a:rPr>
-              <a:t>Teaching cue: Draw x and p as separate memory boxes.</a:t>
-            </a:r>
-          </a:p>
-        </p:txBody>
-      </p:sp>
-      <p:sp>
-        <p:nvSpPr>
           <p:cNvPr id="40" name="Text 8">
             <a:extLst>
               <a:ext uri="{FF2B5EF4-FFF2-40B4-BE49-F238E27FC236}">
@@ -13377,53 +12687,6 @@
           <a:lstStyle/>
           <a:p>
             <a:endParaRPr/>
-          </a:p>
-        </p:txBody>
-      </p:sp>
-      <p:sp>
-        <p:nvSpPr>
-          <p:cNvPr id="53" name="Text 21">
-            <a:extLst>
-              <a:ext uri="{FF2B5EF4-FFF2-40B4-BE49-F238E27FC236}">
-                <a16:creationId xmlns:a16="http://schemas.microsoft.com/office/drawing/2014/main" id="{5625C0BB-B903-430E-B8AE-363B1E9DF024}"/>
-              </a:ext>
-            </a:extLst>
-          </p:cNvPr>
-          <p:cNvSpPr>
-            <a:spLocks noGrp="1"/>
-          </p:cNvSpPr>
-          <p:nvPr/>
-        </p:nvSpPr>
-        <p:spPr>
-          <a:xfrm>
-            <a:off x="457200" y="6419850"/>
-            <a:ext cx="11247120" cy="400050"/>
-          </a:xfrm>
-          <a:prstGeom prst="rect">
-            <a:avLst/>
-          </a:prstGeom>
-          <a:noFill/>
-        </p:spPr>
-        <p:txBody>
-          <a:bodyPr wrap="square" lIns="0" tIns="0" rIns="0" bIns="0" anchor="ctr">
-            <a:normAutofit lnSpcReduction="10000"/>
-          </a:bodyPr>
-          <a:lstStyle/>
-          <a:p>
-            <a:pPr marL="0" indent="0">
-              <a:buNone/>
-            </a:pPr>
-            <a:r>
-              <a:rPr sz="2500" i="1">
-                <a:solidFill>
-                  <a:srgbClr val="475467"/>
-                </a:solidFill>
-                <a:latin typeface="Times New Roman"/>
-                <a:ea typeface="Times New Roman"/>
-                <a:cs typeface="Times New Roman"/>
-              </a:rPr>
-              <a:t>Teaching cue: Draw x and p as separate memory boxes.</a:t>
-            </a:r>
           </a:p>
         </p:txBody>
       </p:sp>
@@ -14437,53 +13700,6 @@
           </a:p>
         </p:txBody>
       </p:sp>
-      <p:sp>
-        <p:nvSpPr>
-          <p:cNvPr id="23" name="Text 21">
-            <a:extLst>
-              <a:ext uri="{FF2B5EF4-FFF2-40B4-BE49-F238E27FC236}">
-                <a16:creationId xmlns:a16="http://schemas.microsoft.com/office/drawing/2014/main" id="{B83BC15D-F3FB-405B-9416-DBCCB5BF7CB9}"/>
-              </a:ext>
-            </a:extLst>
-          </p:cNvPr>
-          <p:cNvSpPr>
-            <a:spLocks noGrp="1"/>
-          </p:cNvSpPr>
-          <p:nvPr/>
-        </p:nvSpPr>
-        <p:spPr>
-          <a:xfrm>
-            <a:off x="457200" y="6419850"/>
-            <a:ext cx="11247120" cy="400050"/>
-          </a:xfrm>
-          <a:prstGeom prst="rect">
-            <a:avLst/>
-          </a:prstGeom>
-          <a:noFill/>
-        </p:spPr>
-        <p:txBody>
-          <a:bodyPr wrap="square" lIns="0" tIns="0" rIns="0" bIns="0" anchor="ctr">
-            <a:normAutofit lnSpcReduction="10000"/>
-          </a:bodyPr>
-          <a:lstStyle/>
-          <a:p>
-            <a:pPr marL="0" indent="0">
-              <a:buNone/>
-            </a:pPr>
-            <a:r>
-              <a:rPr sz="2500" i="1">
-                <a:solidFill>
-                  <a:srgbClr val="475467"/>
-                </a:solidFill>
-                <a:latin typeface="Times New Roman"/>
-                <a:ea typeface="Times New Roman"/>
-                <a:cs typeface="Times New Roman"/>
-              </a:rPr>
-              <a:t>Teaching cue: Trace each statement while pointing to the memory box.</a:t>
-            </a:r>
-          </a:p>
-        </p:txBody>
-      </p:sp>
     </p:spTree>
     <p:extLst>
       <p:ext uri="{BB962C8B-B14F-4D97-AF65-F5344CB8AC3E}">
@@ -15418,53 +14634,6 @@
           </a:p>
         </p:txBody>
       </p:sp>
-      <p:sp>
-        <p:nvSpPr>
-          <p:cNvPr id="22" name="Text 20">
-            <a:extLst>
-              <a:ext uri="{FF2B5EF4-FFF2-40B4-BE49-F238E27FC236}">
-                <a16:creationId xmlns:a16="http://schemas.microsoft.com/office/drawing/2014/main" id="{FD7E2E85-C1FF-44B2-A889-3418CDF7C893}"/>
-              </a:ext>
-            </a:extLst>
-          </p:cNvPr>
-          <p:cNvSpPr>
-            <a:spLocks noGrp="1"/>
-          </p:cNvSpPr>
-          <p:nvPr/>
-        </p:nvSpPr>
-        <p:spPr>
-          <a:xfrm>
-            <a:off x="457200" y="6419850"/>
-            <a:ext cx="11247120" cy="400050"/>
-          </a:xfrm>
-          <a:prstGeom prst="rect">
-            <a:avLst/>
-          </a:prstGeom>
-          <a:noFill/>
-        </p:spPr>
-        <p:txBody>
-          <a:bodyPr wrap="square" lIns="0" tIns="0" rIns="0" bIns="0" anchor="ctr">
-            <a:normAutofit lnSpcReduction="10000"/>
-          </a:bodyPr>
-          <a:lstStyle/>
-          <a:p>
-            <a:pPr marL="0" indent="0">
-              <a:buNone/>
-            </a:pPr>
-            <a:r>
-              <a:rPr sz="2500" i="1">
-                <a:solidFill>
-                  <a:srgbClr val="475467"/>
-                </a:solidFill>
-                <a:latin typeface="Times New Roman"/>
-                <a:ea typeface="Times New Roman"/>
-                <a:cs typeface="Times New Roman"/>
-              </a:rPr>
-              <a:t>Teaching cue: Emphasize that pointer arithmetic must stay inside the array.</a:t>
-            </a:r>
-          </a:p>
-        </p:txBody>
-      </p:sp>
     </p:spTree>
     <p:extLst>
       <p:ext uri="{BB962C8B-B14F-4D97-AF65-F5344CB8AC3E}">
@@ -16352,53 +15521,6 @@
           </a:p>
         </p:txBody>
       </p:sp>
-      <p:sp>
-        <p:nvSpPr>
-          <p:cNvPr id="19" name="Text 17">
-            <a:extLst>
-              <a:ext uri="{FF2B5EF4-FFF2-40B4-BE49-F238E27FC236}">
-                <a16:creationId xmlns:a16="http://schemas.microsoft.com/office/drawing/2014/main" id="{A18C4D79-0F4F-4DE1-9D93-0777115C4F2B}"/>
-              </a:ext>
-            </a:extLst>
-          </p:cNvPr>
-          <p:cNvSpPr>
-            <a:spLocks noGrp="1"/>
-          </p:cNvSpPr>
-          <p:nvPr/>
-        </p:nvSpPr>
-        <p:spPr>
-          <a:xfrm>
-            <a:off x="457200" y="6419850"/>
-            <a:ext cx="11247120" cy="400050"/>
-          </a:xfrm>
-          <a:prstGeom prst="rect">
-            <a:avLst/>
-          </a:prstGeom>
-          <a:noFill/>
-        </p:spPr>
-        <p:txBody>
-          <a:bodyPr wrap="square" lIns="0" tIns="0" rIns="0" bIns="0" anchor="ctr">
-            <a:normAutofit lnSpcReduction="10000"/>
-          </a:bodyPr>
-          <a:lstStyle/>
-          <a:p>
-            <a:pPr marL="0" indent="0">
-              <a:buNone/>
-            </a:pPr>
-            <a:r>
-              <a:rPr sz="2500" i="1">
-                <a:solidFill>
-                  <a:srgbClr val="475467"/>
-                </a:solidFill>
-                <a:latin typeface="Times New Roman"/>
-                <a:ea typeface="Times New Roman"/>
-                <a:cs typeface="Times New Roman"/>
-              </a:rPr>
-              <a:t>Teaching cue: Ask which operation needs the dereference operator.</a:t>
-            </a:r>
-          </a:p>
-        </p:txBody>
-      </p:sp>
     </p:spTree>
     <p:extLst>
       <p:ext uri="{BB962C8B-B14F-4D97-AF65-F5344CB8AC3E}">
@@ -17852,53 +16974,6 @@
       </p:sp>
       <p:sp>
         <p:nvSpPr>
-          <p:cNvPr id="34" name="Text 32">
-            <a:extLst>
-              <a:ext uri="{FF2B5EF4-FFF2-40B4-BE49-F238E27FC236}">
-                <a16:creationId xmlns:a16="http://schemas.microsoft.com/office/drawing/2014/main" id="{D8405FF3-CC3E-4B0E-A081-B15CC4453CE7}"/>
-              </a:ext>
-            </a:extLst>
-          </p:cNvPr>
-          <p:cNvSpPr>
-            <a:spLocks noGrp="1"/>
-          </p:cNvSpPr>
-          <p:nvPr/>
-        </p:nvSpPr>
-        <p:spPr>
-          <a:xfrm>
-            <a:off x="457200" y="6419850"/>
-            <a:ext cx="11247120" cy="400050"/>
-          </a:xfrm>
-          <a:prstGeom prst="rect">
-            <a:avLst/>
-          </a:prstGeom>
-          <a:noFill/>
-        </p:spPr>
-        <p:txBody>
-          <a:bodyPr wrap="square" lIns="0" tIns="0" rIns="0" bIns="0" anchor="ctr">
-            <a:normAutofit lnSpcReduction="10000"/>
-          </a:bodyPr>
-          <a:lstStyle/>
-          <a:p>
-            <a:pPr marL="0" indent="0">
-              <a:buNone/>
-            </a:pPr>
-            <a:r>
-              <a:rPr sz="2500" i="1">
-                <a:solidFill>
-                  <a:srgbClr val="475467"/>
-                </a:solidFill>
-                <a:latin typeface="Times New Roman"/>
-                <a:ea typeface="Times New Roman"/>
-                <a:cs typeface="Times New Roman"/>
-              </a:rPr>
-              <a:t>Teaching cue: Keep parentheses around *ps before applying the dot operator.</a:t>
-            </a:r>
-          </a:p>
-        </p:txBody>
-      </p:sp>
-      <p:sp>
-        <p:nvSpPr>
           <p:cNvPr id="62" name="Text 8">
             <a:extLst>
               <a:ext uri="{FF2B5EF4-FFF2-40B4-BE49-F238E27FC236}">
@@ -18919,91 +17994,6 @@
                 <a:cs typeface="Times New Roman"/>
               </a:rPr>
               <a:t>Key idea: ps-&gt;field is a readable form of (*ps).field.</a:t>
-            </a:r>
-          </a:p>
-        </p:txBody>
-      </p:sp>
-      <p:sp>
-        <p:nvSpPr>
-          <p:cNvPr id="85" name="Shape 31">
-            <a:extLst>
-              <a:ext uri="{FF2B5EF4-FFF2-40B4-BE49-F238E27FC236}">
-                <a16:creationId xmlns:a16="http://schemas.microsoft.com/office/drawing/2014/main" id="{BE3DD3B4-8CA6-4A1C-8871-57696A96907A}"/>
-              </a:ext>
-            </a:extLst>
-          </p:cNvPr>
-          <p:cNvSpPr>
-            <a:spLocks noGrp="1"/>
-          </p:cNvSpPr>
-          <p:nvPr/>
-        </p:nvSpPr>
-        <p:spPr>
-          <a:xfrm>
-            <a:off x="411480" y="6419088"/>
-            <a:ext cx="11384280" cy="0"/>
-          </a:xfrm>
-          <a:prstGeom prst="line">
-            <a:avLst/>
-          </a:prstGeom>
-          <a:noFill/>
-          <a:ln w="10160">
-            <a:solidFill>
-              <a:srgbClr val="D0D5DD"/>
-            </a:solidFill>
-            <a:prstDash val="solid"/>
-          </a:ln>
-        </p:spPr>
-        <p:txBody>
-          <a:bodyPr/>
-          <a:lstStyle/>
-          <a:p>
-            <a:endParaRPr/>
-          </a:p>
-        </p:txBody>
-      </p:sp>
-      <p:sp>
-        <p:nvSpPr>
-          <p:cNvPr id="86" name="Text 32">
-            <a:extLst>
-              <a:ext uri="{FF2B5EF4-FFF2-40B4-BE49-F238E27FC236}">
-                <a16:creationId xmlns:a16="http://schemas.microsoft.com/office/drawing/2014/main" id="{CDA0E555-EC71-4E6C-9D5E-B758DEC23199}"/>
-              </a:ext>
-            </a:extLst>
-          </p:cNvPr>
-          <p:cNvSpPr>
-            <a:spLocks noGrp="1"/>
-          </p:cNvSpPr>
-          <p:nvPr/>
-        </p:nvSpPr>
-        <p:spPr>
-          <a:xfrm>
-            <a:off x="457200" y="6419850"/>
-            <a:ext cx="11247120" cy="400050"/>
-          </a:xfrm>
-          <a:prstGeom prst="rect">
-            <a:avLst/>
-          </a:prstGeom>
-          <a:noFill/>
-        </p:spPr>
-        <p:txBody>
-          <a:bodyPr wrap="square" lIns="0" tIns="0" rIns="0" bIns="0" anchor="ctr">
-            <a:normAutofit lnSpcReduction="10000"/>
-          </a:bodyPr>
-          <a:lstStyle/>
-          <a:p>
-            <a:pPr marL="0" indent="0">
-              <a:buNone/>
-            </a:pPr>
-            <a:r>
-              <a:rPr sz="2500" i="1">
-                <a:solidFill>
-                  <a:srgbClr val="475467"/>
-                </a:solidFill>
-                <a:latin typeface="Times New Roman"/>
-                <a:ea typeface="Times New Roman"/>
-                <a:cs typeface="Times New Roman"/>
-              </a:rPr>
-              <a:t>Teaching cue: Keep parentheses around *ps before applying the dot operator.</a:t>
             </a:r>
           </a:p>
         </p:txBody>
